--- a/DataAnalysis_Track/decks/DA_S05_Joining_tables_carefully.pptx
+++ b/DataAnalysis_Track/decks/DA_S05_Joining_tables_carefully.pptx
@@ -481,7 +481,7 @@
 </file>
 
 <file path=ppt/notesSlides/notesSlide1.xml><?xml version="1.0" encoding="utf-8"?>
-<p:notes xmlns:a="http://schemas.openxmlformats.org/drawingml/2006/main" xmlns:p="http://schemas.openxmlformats.org/presentationml/2006/main" xmlns:r="http://schemas.openxmlformats.org/officeDocument/2006/relationships">
+<p:notes xmlns:a="http://schemas.openxmlformats.org/drawingml/2006/main" xmlns:p="http://schemas.openxmlformats.org/presentationml/2006/main">
   <p:cSld>
     <p:spTree>
       <p:nvGrpSpPr>
@@ -525,7 +525,87 @@
           <a:lstStyle/>
           <a:p>
             <a:r>
+              <a:t>TEACHING PURPOSE</a:t>
+            </a:r>
+          </a:p>
+          <a:p>
+            <a:r>
+              <a:t>Joining tables, carefully</a:t>
+            </a:r>
+          </a:p>
+          <a:p>
+            <a:r>
+              <a:t/>
+            </a:r>
+          </a:p>
+          <a:p>
+            <a:r>
+              <a:t>LECTURER CUE</a:t>
+            </a:r>
+          </a:p>
+          <a:p>
+            <a:r>
               <a:t>Start on time.</a:t>
+            </a:r>
+          </a:p>
+          <a:p>
+            <a:r>
+              <a:t/>
+            </a:r>
+          </a:p>
+          <a:p>
+            <a:r>
+              <a:t>EXPLAIN IN ORDINARY WORDS</a:t>
+            </a:r>
+          </a:p>
+          <a:p>
+            <a:r>
+              <a:t>Grain means what one row represents. A key identifies a row; a primary key may use more than one column. A join matches keys, and multiple matches can multiply rows.</a:t>
+            </a:r>
+          </a:p>
+          <a:p>
+            <a:r>
+              <a:t/>
+            </a:r>
+          </a:p>
+          <a:p>
+            <a:r>
+              <a:t>CHECK AND EXPECTED ANSWER</a:t>
+            </a:r>
+          </a:p>
+          <a:p>
+            <a:r>
+              <a:t>One order has two lines. After joining orders to lines, how many rows for it? Two. Summing a repeated order-level total would double-count.</a:t>
+            </a:r>
+          </a:p>
+          <a:p>
+            <a:r>
+              <a:t/>
+            </a:r>
+          </a:p>
+          <a:p>
+            <a:r>
+              <a:t>IF LEARNERS ARE STUCK</a:t>
+            </a:r>
+          </a:p>
+          <a:p>
+            <a:r>
+              <a:t>Write one example row from each table. Circle keys and trace each match. Aggregate to the intended grain and check counts and totals.</a:t>
+            </a:r>
+          </a:p>
+          <a:p>
+            <a:r>
+              <a:t/>
+            </a:r>
+          </a:p>
+          <a:p>
+            <a:r>
+              <a:t>NEXT</a:t>
+            </a:r>
+          </a:p>
+          <a:p>
+            <a:r>
+              <a:t>Where tonight sits. Move on after a learner can explain the current example or required action.</a:t>
             </a:r>
           </a:p>
         </p:txBody>
@@ -551,7 +631,7 @@
 </file>
 
 <file path=ppt/notesSlides/notesSlide10.xml><?xml version="1.0" encoding="utf-8"?>
-<p:notes xmlns:a="http://schemas.openxmlformats.org/drawingml/2006/main" xmlns:p="http://schemas.openxmlformats.org/presentationml/2006/main" xmlns:r="http://schemas.openxmlformats.org/officeDocument/2006/relationships">
+<p:notes xmlns:a="http://schemas.openxmlformats.org/drawingml/2006/main" xmlns:p="http://schemas.openxmlformats.org/presentationml/2006/main">
   <p:cSld>
     <p:spTree>
       <p:nvGrpSpPr>
@@ -593,7 +673,91 @@
         <p:txBody>
           <a:bodyPr/>
           <a:lstStyle/>
-          <a:p/>
+          <a:p>
+            <a:r>
+              <a:t>TEACHING PURPOSE</a:t>
+            </a:r>
+          </a:p>
+          <a:p>
+            <a:r>
+              <a:t>Watch the row count decide the answer</a:t>
+            </a:r>
+          </a:p>
+          <a:p>
+            <a:r>
+              <a:t/>
+            </a:r>
+          </a:p>
+          <a:p>
+            <a:r>
+              <a:t>CONNECT</a:t>
+            </a:r>
+          </a:p>
+          <a:p>
+            <a:r>
+              <a:t>Build on the preceding slide: CTE.</a:t>
+            </a:r>
+          </a:p>
+          <a:p>
+            <a:r>
+              <a:t/>
+            </a:r>
+          </a:p>
+          <a:p>
+            <a:r>
+              <a:t>EXPLAIN IN ORDINARY WORDS</a:t>
+            </a:r>
+          </a:p>
+          <a:p>
+            <a:r>
+              <a:t>Grain means what one row represents. A key identifies a row; a primary key may use more than one column. A join matches keys, and multiple matches can multiply rows.</a:t>
+            </a:r>
+          </a:p>
+          <a:p>
+            <a:r>
+              <a:t/>
+            </a:r>
+          </a:p>
+          <a:p>
+            <a:r>
+              <a:t>CHECK AND EXPECTED ANSWER</a:t>
+            </a:r>
+          </a:p>
+          <a:p>
+            <a:r>
+              <a:t>One order has two lines. After joining orders to lines, how many rows for it? Two. Summing a repeated order-level total would double-count.</a:t>
+            </a:r>
+          </a:p>
+          <a:p>
+            <a:r>
+              <a:t/>
+            </a:r>
+          </a:p>
+          <a:p>
+            <a:r>
+              <a:t>IF LEARNERS ARE STUCK</a:t>
+            </a:r>
+          </a:p>
+          <a:p>
+            <a:r>
+              <a:t>Write one example row from each table. Circle keys and trace each match. Aggregate to the intended grain and check counts and totals.</a:t>
+            </a:r>
+          </a:p>
+          <a:p>
+            <a:r>
+              <a:t/>
+            </a:r>
+          </a:p>
+          <a:p>
+            <a:r>
+              <a:t>NEXT</a:t>
+            </a:r>
+          </a:p>
+          <a:p>
+            <a:r>
+              <a:t>Break. Move on after a learner can explain the current example or required action.</a:t>
+            </a:r>
+          </a:p>
         </p:txBody>
       </p:sp>
       <p:sp>
@@ -616,8 +780,8 @@
 </p:notes>
 </file>
 
-<file path=ppt/notesSlides/notesSlide11.xml><?xml version="1.0" encoding="utf-8"?>
-<p:notes xmlns:a="http://schemas.openxmlformats.org/drawingml/2006/main" xmlns:p="http://schemas.openxmlformats.org/presentationml/2006/main" xmlns:r="http://schemas.openxmlformats.org/officeDocument/2006/relationships">
+<file path=ppt/notesSlides/notesSlide10006.xml><?xml version="1.0" encoding="utf-8"?>
+<p:notes xmlns:a="http://schemas.openxmlformats.org/drawingml/2006/main" xmlns:p="http://schemas.openxmlformats.org/presentationml/2006/main">
   <p:cSld>
     <p:spTree>
       <p:nvGrpSpPr>
@@ -661,7 +825,87 @@
           <a:lstStyle/>
           <a:p>
             <a:r>
-              <a:t>Ten minutes.</a:t>
+              <a:t>TEACHING PURPOSE</a:t>
+            </a:r>
+          </a:p>
+          <a:p>
+            <a:r>
+              <a:t>INNER and LEFT, and the row count that tells you</a:t>
+            </a:r>
+          </a:p>
+          <a:p>
+            <a:r>
+              <a:t/>
+            </a:r>
+          </a:p>
+          <a:p>
+            <a:r>
+              <a:t>CONNECT</a:t>
+            </a:r>
+          </a:p>
+          <a:p>
+            <a:r>
+              <a:t>Build on the preceding slide: Your total went up when you joined a table..</a:t>
+            </a:r>
+          </a:p>
+          <a:p>
+            <a:r>
+              <a:t/>
+            </a:r>
+          </a:p>
+          <a:p>
+            <a:r>
+              <a:t>EXPLAIN IN ORDINARY WORDS</a:t>
+            </a:r>
+          </a:p>
+          <a:p>
+            <a:r>
+              <a:t>Grain means what one row represents. A key identifies a row; a primary key may use more than one column. A join matches keys, and multiple matches can multiply rows.</a:t>
+            </a:r>
+          </a:p>
+          <a:p>
+            <a:r>
+              <a:t/>
+            </a:r>
+          </a:p>
+          <a:p>
+            <a:r>
+              <a:t>CHECK AND EXPECTED ANSWER</a:t>
+            </a:r>
+          </a:p>
+          <a:p>
+            <a:r>
+              <a:t>One order has two lines. After joining orders to lines, how many rows for it? Two. Summing a repeated order-level total would double-count.</a:t>
+            </a:r>
+          </a:p>
+          <a:p>
+            <a:r>
+              <a:t/>
+            </a:r>
+          </a:p>
+          <a:p>
+            <a:r>
+              <a:t>IF LEARNERS ARE STUCK</a:t>
+            </a:r>
+          </a:p>
+          <a:p>
+            <a:r>
+              <a:t>Write one example row from each table. Circle keys and trace each match. Aggregate to the intended grain and check counts and totals.</a:t>
+            </a:r>
+          </a:p>
+          <a:p>
+            <a:r>
+              <a:t/>
+            </a:r>
+          </a:p>
+          <a:p>
+            <a:r>
+              <a:t>NEXT</a:t>
+            </a:r>
+          </a:p>
+          <a:p>
+            <a:r>
+              <a:t>INNER JOIN. Move on after a learner can explain the current example or required action.</a:t>
             </a:r>
           </a:p>
         </p:txBody>
@@ -686,8 +930,8 @@
 </p:notes>
 </file>
 
-<file path=ppt/notesSlides/notesSlide12.xml><?xml version="1.0" encoding="utf-8"?>
-<p:notes xmlns:a="http://schemas.openxmlformats.org/drawingml/2006/main" xmlns:p="http://schemas.openxmlformats.org/presentationml/2006/main" xmlns:r="http://schemas.openxmlformats.org/officeDocument/2006/relationships">
+<file path=ppt/notesSlides/notesSlide10013.xml><?xml version="1.0" encoding="utf-8"?>
+<p:notes xmlns:a="http://schemas.openxmlformats.org/drawingml/2006/main" xmlns:p="http://schemas.openxmlformats.org/presentationml/2006/main">
   <p:cSld>
     <p:spTree>
       <p:nvGrpSpPr>
@@ -729,7 +973,91 @@
         <p:txBody>
           <a:bodyPr/>
           <a:lstStyle/>
-          <a:p/>
+          <a:p>
+            <a:r>
+              <a:t>TEACHING PURPOSE</a:t>
+            </a:r>
+          </a:p>
+          <a:p>
+            <a:r>
+              <a:t>Fan-out, and queries somebody else can read</a:t>
+            </a:r>
+          </a:p>
+          <a:p>
+            <a:r>
+              <a:t/>
+            </a:r>
+          </a:p>
+          <a:p>
+            <a:r>
+              <a:t>CONNECT</a:t>
+            </a:r>
+          </a:p>
+          <a:p>
+            <a:r>
+              <a:t>Build on the preceding slide: Break.</a:t>
+            </a:r>
+          </a:p>
+          <a:p>
+            <a:r>
+              <a:t/>
+            </a:r>
+          </a:p>
+          <a:p>
+            <a:r>
+              <a:t>EXPLAIN IN ORDINARY WORDS</a:t>
+            </a:r>
+          </a:p>
+          <a:p>
+            <a:r>
+              <a:t>Grain means what one row represents. A key identifies a row; a primary key may use more than one column. A join matches keys, and multiple matches can multiply rows.</a:t>
+            </a:r>
+          </a:p>
+          <a:p>
+            <a:r>
+              <a:t/>
+            </a:r>
+          </a:p>
+          <a:p>
+            <a:r>
+              <a:t>CHECK AND EXPECTED ANSWER</a:t>
+            </a:r>
+          </a:p>
+          <a:p>
+            <a:r>
+              <a:t>One order has two lines. After joining orders to lines, how many rows for it? Two. Summing a repeated order-level total would double-count.</a:t>
+            </a:r>
+          </a:p>
+          <a:p>
+            <a:r>
+              <a:t/>
+            </a:r>
+          </a:p>
+          <a:p>
+            <a:r>
+              <a:t>IF LEARNERS ARE STUCK</a:t>
+            </a:r>
+          </a:p>
+          <a:p>
+            <a:r>
+              <a:t>Write one example row from each table. Circle keys and trace each match. Aggregate to the intended grain and check counts and totals.</a:t>
+            </a:r>
+          </a:p>
+          <a:p>
+            <a:r>
+              <a:t/>
+            </a:r>
+          </a:p>
+          <a:p>
+            <a:r>
+              <a:t>NEXT</a:t>
+            </a:r>
+          </a:p>
+          <a:p>
+            <a:r>
+              <a:t>Fan-out, made visible. Move on after a learner can explain the current example or required action.</a:t>
+            </a:r>
+          </a:p>
         </p:txBody>
       </p:sp>
       <p:sp>
@@ -752,8 +1080,8 @@
 </p:notes>
 </file>
 
-<file path=ppt/notesSlides/notesSlide13.xml><?xml version="1.0" encoding="utf-8"?>
-<p:notes xmlns:a="http://schemas.openxmlformats.org/drawingml/2006/main" xmlns:p="http://schemas.openxmlformats.org/presentationml/2006/main" xmlns:r="http://schemas.openxmlformats.org/officeDocument/2006/relationships">
+<file path=ppt/notesSlides/notesSlide11.xml><?xml version="1.0" encoding="utf-8"?>
+<p:notes xmlns:a="http://schemas.openxmlformats.org/drawingml/2006/main" xmlns:p="http://schemas.openxmlformats.org/presentationml/2006/main">
   <p:cSld>
     <p:spTree>
       <p:nvGrpSpPr>
@@ -795,7 +1123,61 @@
         <p:txBody>
           <a:bodyPr/>
           <a:lstStyle/>
-          <a:p/>
+          <a:p>
+            <a:r>
+              <a:t>TEACHING PURPOSE</a:t>
+            </a:r>
+          </a:p>
+          <a:p>
+            <a:r>
+              <a:t>Break</a:t>
+            </a:r>
+          </a:p>
+          <a:p>
+            <a:r>
+              <a:t/>
+            </a:r>
+          </a:p>
+          <a:p>
+            <a:r>
+              <a:t>CONNECT</a:t>
+            </a:r>
+          </a:p>
+          <a:p>
+            <a:r>
+              <a:t>Build on the preceding slide: Watch the row count decide the answer.</a:t>
+            </a:r>
+          </a:p>
+          <a:p>
+            <a:r>
+              <a:t/>
+            </a:r>
+          </a:p>
+          <a:p>
+            <a:r>
+              <a:t>LECTURER CUE</a:t>
+            </a:r>
+          </a:p>
+          <a:p>
+            <a:r>
+              <a:t>Ten minutes.</a:t>
+            </a:r>
+          </a:p>
+          <a:p>
+            <a:r>
+              <a:t/>
+            </a:r>
+          </a:p>
+          <a:p>
+            <a:r>
+              <a:t>NEXT</a:t>
+            </a:r>
+          </a:p>
+          <a:p>
+            <a:r>
+              <a:t>Fan-out, and queries somebody else can read. Move on after a learner can explain the current example or required action.</a:t>
+            </a:r>
+          </a:p>
         </p:txBody>
       </p:sp>
       <p:sp>
@@ -818,8 +1200,8 @@
 </p:notes>
 </file>
 
-<file path=ppt/notesSlides/notesSlide14.xml><?xml version="1.0" encoding="utf-8"?>
-<p:notes xmlns:a="http://schemas.openxmlformats.org/drawingml/2006/main" xmlns:p="http://schemas.openxmlformats.org/presentationml/2006/main" xmlns:r="http://schemas.openxmlformats.org/officeDocument/2006/relationships">
+<file path=ppt/notesSlides/notesSlide12.xml><?xml version="1.0" encoding="utf-8"?>
+<p:notes xmlns:a="http://schemas.openxmlformats.org/drawingml/2006/main" xmlns:p="http://schemas.openxmlformats.org/presentationml/2006/main">
   <p:cSld>
     <p:spTree>
       <p:nvGrpSpPr>
@@ -863,7 +1245,87 @@
           <a:lstStyle/>
           <a:p>
             <a:r>
-              <a:t>Revenue by rep by month for 2025, net of returns. Two CTEs and a final SELECT, built and checked one step at a time.</a:t>
+              <a:t>TEACHING PURPOSE</a:t>
+            </a:r>
+          </a:p>
+          <a:p>
+            <a:r>
+              <a:t>Fan-out, made visible</a:t>
+            </a:r>
+          </a:p>
+          <a:p>
+            <a:r>
+              <a:t/>
+            </a:r>
+          </a:p>
+          <a:p>
+            <a:r>
+              <a:t>CONNECT</a:t>
+            </a:r>
+          </a:p>
+          <a:p>
+            <a:r>
+              <a:t>Build on the preceding slide: Fan-out, and queries somebody else can read.</a:t>
+            </a:r>
+          </a:p>
+          <a:p>
+            <a:r>
+              <a:t/>
+            </a:r>
+          </a:p>
+          <a:p>
+            <a:r>
+              <a:t>EXPLAIN IN ORDINARY WORDS</a:t>
+            </a:r>
+          </a:p>
+          <a:p>
+            <a:r>
+              <a:t>Grain means what one row represents. A key identifies a row; a primary key may use more than one column. A join matches keys, and multiple matches can multiply rows.</a:t>
+            </a:r>
+          </a:p>
+          <a:p>
+            <a:r>
+              <a:t/>
+            </a:r>
+          </a:p>
+          <a:p>
+            <a:r>
+              <a:t>CHECK AND EXPECTED ANSWER</a:t>
+            </a:r>
+          </a:p>
+          <a:p>
+            <a:r>
+              <a:t>One order has two lines. After joining orders to lines, how many rows for it? Two. Summing a repeated order-level total would double-count.</a:t>
+            </a:r>
+          </a:p>
+          <a:p>
+            <a:r>
+              <a:t/>
+            </a:r>
+          </a:p>
+          <a:p>
+            <a:r>
+              <a:t>IF LEARNERS ARE STUCK</a:t>
+            </a:r>
+          </a:p>
+          <a:p>
+            <a:r>
+              <a:t>Write one example row from each table. Circle keys and trace each match. Aggregate to the intended grain and check counts and totals.</a:t>
+            </a:r>
+          </a:p>
+          <a:p>
+            <a:r>
+              <a:t/>
+            </a:r>
+          </a:p>
+          <a:p>
+            <a:r>
+              <a:t>NEXT</a:t>
+            </a:r>
+          </a:p>
+          <a:p>
+            <a:r>
+              <a:t>Three named steps instead of one long query. Move on after a learner can explain the current example or required action.</a:t>
             </a:r>
           </a:p>
         </p:txBody>
@@ -888,8 +1350,8 @@
 </p:notes>
 </file>
 
-<file path=ppt/notesSlides/notesSlide15.xml><?xml version="1.0" encoding="utf-8"?>
-<p:notes xmlns:a="http://schemas.openxmlformats.org/drawingml/2006/main" xmlns:p="http://schemas.openxmlformats.org/presentationml/2006/main" xmlns:r="http://schemas.openxmlformats.org/officeDocument/2006/relationships">
+<file path=ppt/notesSlides/notesSlide13.xml><?xml version="1.0" encoding="utf-8"?>
+<p:notes xmlns:a="http://schemas.openxmlformats.org/drawingml/2006/main" xmlns:p="http://schemas.openxmlformats.org/presentationml/2006/main">
   <p:cSld>
     <p:spTree>
       <p:nvGrpSpPr>
@@ -931,7 +1393,91 @@
         <p:txBody>
           <a:bodyPr/>
           <a:lstStyle/>
-          <a:p/>
+          <a:p>
+            <a:r>
+              <a:t>TEACHING PURPOSE</a:t>
+            </a:r>
+          </a:p>
+          <a:p>
+            <a:r>
+              <a:t>Three named steps instead of one long query</a:t>
+            </a:r>
+          </a:p>
+          <a:p>
+            <a:r>
+              <a:t/>
+            </a:r>
+          </a:p>
+          <a:p>
+            <a:r>
+              <a:t>CONNECT</a:t>
+            </a:r>
+          </a:p>
+          <a:p>
+            <a:r>
+              <a:t>Build on the preceding slide: Fan-out, made visible.</a:t>
+            </a:r>
+          </a:p>
+          <a:p>
+            <a:r>
+              <a:t/>
+            </a:r>
+          </a:p>
+          <a:p>
+            <a:r>
+              <a:t>EXPLAIN IN ORDINARY WORDS</a:t>
+            </a:r>
+          </a:p>
+          <a:p>
+            <a:r>
+              <a:t>Grain means what one row represents. A key identifies a row; a primary key may use more than one column. A join matches keys, and multiple matches can multiply rows.</a:t>
+            </a:r>
+          </a:p>
+          <a:p>
+            <a:r>
+              <a:t/>
+            </a:r>
+          </a:p>
+          <a:p>
+            <a:r>
+              <a:t>CHECK AND EXPECTED ANSWER</a:t>
+            </a:r>
+          </a:p>
+          <a:p>
+            <a:r>
+              <a:t>One order has two lines. After joining orders to lines, how many rows for it? Two. Summing a repeated order-level total would double-count.</a:t>
+            </a:r>
+          </a:p>
+          <a:p>
+            <a:r>
+              <a:t/>
+            </a:r>
+          </a:p>
+          <a:p>
+            <a:r>
+              <a:t>IF LEARNERS ARE STUCK</a:t>
+            </a:r>
+          </a:p>
+          <a:p>
+            <a:r>
+              <a:t>Write one example row from each table. Circle keys and trace each match. Aggregate to the intended grain and check counts and totals.</a:t>
+            </a:r>
+          </a:p>
+          <a:p>
+            <a:r>
+              <a:t/>
+            </a:r>
+          </a:p>
+          <a:p>
+            <a:r>
+              <a:t>NEXT</a:t>
+            </a:r>
+          </a:p>
+          <a:p>
+            <a:r>
+              <a:t>The report the sales manager actually wants. Move on after a learner can explain the current example or required action.</a:t>
+            </a:r>
+          </a:p>
         </p:txBody>
       </p:sp>
       <p:sp>
@@ -954,8 +1500,8 @@
 </p:notes>
 </file>
 
-<file path=ppt/notesSlides/notesSlide16.xml><?xml version="1.0" encoding="utf-8"?>
-<p:notes xmlns:a="http://schemas.openxmlformats.org/drawingml/2006/main" xmlns:p="http://schemas.openxmlformats.org/presentationml/2006/main" xmlns:r="http://schemas.openxmlformats.org/officeDocument/2006/relationships">
+<file path=ppt/notesSlides/notesSlide14.xml><?xml version="1.0" encoding="utf-8"?>
+<p:notes xmlns:a="http://schemas.openxmlformats.org/drawingml/2006/main" xmlns:p="http://schemas.openxmlformats.org/presentationml/2006/main">
   <p:cSld>
     <p:spTree>
       <p:nvGrpSpPr>
@@ -999,7 +1545,102 @@
           <a:lstStyle/>
           <a:p>
             <a:r>
-              <a:t>A join that multiplies rows. The total gets bigger and looks plausible, and the only tell is the row count.</a:t>
+              <a:t>TEACHING PURPOSE</a:t>
+            </a:r>
+          </a:p>
+          <a:p>
+            <a:r>
+              <a:t>The report the sales manager actually wants</a:t>
+            </a:r>
+          </a:p>
+          <a:p>
+            <a:r>
+              <a:t/>
+            </a:r>
+          </a:p>
+          <a:p>
+            <a:r>
+              <a:t>CONNECT</a:t>
+            </a:r>
+          </a:p>
+          <a:p>
+            <a:r>
+              <a:t>Build on the preceding slide: Three named steps instead of one long query.</a:t>
+            </a:r>
+          </a:p>
+          <a:p>
+            <a:r>
+              <a:t/>
+            </a:r>
+          </a:p>
+          <a:p>
+            <a:r>
+              <a:t>LECTURER CUE</a:t>
+            </a:r>
+          </a:p>
+          <a:p>
+            <a:r>
+              <a:t>Revenue by rep by month for 2025, net of returns. Two CTEs and a final SELECT, built and checked one step at a time.</a:t>
+            </a:r>
+          </a:p>
+          <a:p>
+            <a:r>
+              <a:t/>
+            </a:r>
+          </a:p>
+          <a:p>
+            <a:r>
+              <a:t>EXPLAIN IN ORDINARY WORDS</a:t>
+            </a:r>
+          </a:p>
+          <a:p>
+            <a:r>
+              <a:t>Grain means what one row represents. A key identifies a row; a primary key may use more than one column. A join matches keys, and multiple matches can multiply rows.</a:t>
+            </a:r>
+          </a:p>
+          <a:p>
+            <a:r>
+              <a:t/>
+            </a:r>
+          </a:p>
+          <a:p>
+            <a:r>
+              <a:t>CHECK AND EXPECTED ANSWER</a:t>
+            </a:r>
+          </a:p>
+          <a:p>
+            <a:r>
+              <a:t>One order has two lines. After joining orders to lines, how many rows for it? Two. Summing a repeated order-level total would double-count.</a:t>
+            </a:r>
+          </a:p>
+          <a:p>
+            <a:r>
+              <a:t/>
+            </a:r>
+          </a:p>
+          <a:p>
+            <a:r>
+              <a:t>IF LEARNERS ARE STUCK</a:t>
+            </a:r>
+          </a:p>
+          <a:p>
+            <a:r>
+              <a:t>Write one example row from each table. Circle keys and trace each match. Aggregate to the intended grain and check counts and totals.</a:t>
+            </a:r>
+          </a:p>
+          <a:p>
+            <a:r>
+              <a:t/>
+            </a:r>
+          </a:p>
+          <a:p>
+            <a:r>
+              <a:t>NEXT</a:t>
+            </a:r>
+          </a:p>
+          <a:p>
+            <a:r>
+              <a:t>Checkpoint 1. Move on after a learner can explain the current example or required action.</a:t>
             </a:r>
           </a:p>
         </p:txBody>
@@ -1024,8 +1665,8 @@
 </p:notes>
 </file>
 
-<file path=ppt/notesSlides/notesSlide17.xml><?xml version="1.0" encoding="utf-8"?>
-<p:notes xmlns:a="http://schemas.openxmlformats.org/drawingml/2006/main" xmlns:p="http://schemas.openxmlformats.org/presentationml/2006/main" xmlns:r="http://schemas.openxmlformats.org/officeDocument/2006/relationships">
+<file path=ppt/notesSlides/notesSlide15.xml><?xml version="1.0" encoding="utf-8"?>
+<p:notes xmlns:a="http://schemas.openxmlformats.org/drawingml/2006/main" xmlns:p="http://schemas.openxmlformats.org/presentationml/2006/main">
   <p:cSld>
     <p:spTree>
       <p:nvGrpSpPr>
@@ -1067,7 +1708,106 @@
         <p:txBody>
           <a:bodyPr/>
           <a:lstStyle/>
-          <a:p/>
+          <a:p>
+            <a:r>
+              <a:t>TEACHING PURPOSE</a:t>
+            </a:r>
+          </a:p>
+          <a:p>
+            <a:r>
+              <a:t>Checkpoint 1</a:t>
+            </a:r>
+          </a:p>
+          <a:p>
+            <a:r>
+              <a:t/>
+            </a:r>
+          </a:p>
+          <a:p>
+            <a:r>
+              <a:t>CONNECT</a:t>
+            </a:r>
+          </a:p>
+          <a:p>
+            <a:r>
+              <a:t>Build on the preceding slide: The report the sales manager actually wants.</a:t>
+            </a:r>
+          </a:p>
+          <a:p>
+            <a:r>
+              <a:t/>
+            </a:r>
+          </a:p>
+          <a:p>
+            <a:r>
+              <a:t>EXPLAIN IN ORDINARY WORDS</a:t>
+            </a:r>
+          </a:p>
+          <a:p>
+            <a:r>
+              <a:t>Grain means what one row represents. A key identifies a row; a primary key may use more than one column. A join matches keys, and multiple matches can multiply rows.</a:t>
+            </a:r>
+          </a:p>
+          <a:p>
+            <a:r>
+              <a:t/>
+            </a:r>
+          </a:p>
+          <a:p>
+            <a:r>
+              <a:t>CHECK AND EXPECTED ANSWER</a:t>
+            </a:r>
+          </a:p>
+          <a:p>
+            <a:r>
+              <a:t>One order has two lines. After joining orders to lines, how many rows for it? Two. Summing a repeated order-level total would double-count.</a:t>
+            </a:r>
+          </a:p>
+          <a:p>
+            <a:r>
+              <a:t/>
+            </a:r>
+          </a:p>
+          <a:p>
+            <a:r>
+              <a:t>IF LEARNERS ARE STUCK</a:t>
+            </a:r>
+          </a:p>
+          <a:p>
+            <a:r>
+              <a:t>Write one example row from each table. Circle keys and trace each match. Aggregate to the intended grain and check counts and totals.</a:t>
+            </a:r>
+          </a:p>
+          <a:p>
+            <a:r>
+              <a:t/>
+            </a:r>
+          </a:p>
+          <a:p>
+            <a:r>
+              <a:t>ASSIGNMENT HANDOVER</a:t>
+            </a:r>
+          </a:p>
+          <a:p>
+            <a:r>
+              <a:t>Open the matching public student guide and show the exact starter filename, required outputs and upload set. Ask one learner to repeat what to submit and where. IUEA Student Registration Number is required freeform text; learners enter their own number. A saved repository is not a submitted form. Read the live deadline and keep the submission confirmation. Do not release an assessment that is still awaiting grading validation.</a:t>
+            </a:r>
+          </a:p>
+          <a:p>
+            <a:r>
+              <a:t/>
+            </a:r>
+          </a:p>
+          <a:p>
+            <a:r>
+              <a:t>NEXT</a:t>
+            </a:r>
+          </a:p>
+          <a:p>
+            <a:r>
+              <a:t>A join that multiplies rows. The total gets bigger and looks plausible, and the only tell is the row count.. Move on after a learner can explain the current example or required action.</a:t>
+            </a:r>
+          </a:p>
         </p:txBody>
       </p:sp>
       <p:sp>
@@ -1090,8 +1830,8 @@
 </p:notes>
 </file>
 
-<file path=ppt/notesSlides/notesSlide18.xml><?xml version="1.0" encoding="utf-8"?>
-<p:notes xmlns:a="http://schemas.openxmlformats.org/drawingml/2006/main" xmlns:p="http://schemas.openxmlformats.org/presentationml/2006/main" xmlns:r="http://schemas.openxmlformats.org/officeDocument/2006/relationships">
+<file path=ppt/notesSlides/notesSlide16.xml><?xml version="1.0" encoding="utf-8"?>
+<p:notes xmlns:a="http://schemas.openxmlformats.org/drawingml/2006/main" xmlns:p="http://schemas.openxmlformats.org/presentationml/2006/main">
   <p:cSld>
     <p:spTree>
       <p:nvGrpSpPr>
@@ -1133,7 +1873,106 @@
         <p:txBody>
           <a:bodyPr/>
           <a:lstStyle/>
-          <a:p/>
+          <a:p>
+            <a:r>
+              <a:t>TEACHING PURPOSE</a:t>
+            </a:r>
+          </a:p>
+          <a:p>
+            <a:r>
+              <a:t>A join that multiplies rows. The total gets bigger and looks plausible, and the only tell is the row count.</a:t>
+            </a:r>
+          </a:p>
+          <a:p>
+            <a:r>
+              <a:t/>
+            </a:r>
+          </a:p>
+          <a:p>
+            <a:r>
+              <a:t>CONNECT</a:t>
+            </a:r>
+          </a:p>
+          <a:p>
+            <a:r>
+              <a:t>Build on the preceding slide: Checkpoint 1.</a:t>
+            </a:r>
+          </a:p>
+          <a:p>
+            <a:r>
+              <a:t/>
+            </a:r>
+          </a:p>
+          <a:p>
+            <a:r>
+              <a:t>LECTURER CUE</a:t>
+            </a:r>
+          </a:p>
+          <a:p>
+            <a:r>
+              <a:t>A join that multiplies rows. The total gets bigger and looks plausible, and the only tell is the row count.</a:t>
+            </a:r>
+          </a:p>
+          <a:p>
+            <a:r>
+              <a:t/>
+            </a:r>
+          </a:p>
+          <a:p>
+            <a:r>
+              <a:t>EXPLAIN IN ORDINARY WORDS</a:t>
+            </a:r>
+          </a:p>
+          <a:p>
+            <a:r>
+              <a:t>Grain means what one row represents. A key identifies a row; a primary key may use more than one column. A join matches keys, and multiple matches can multiply rows.</a:t>
+            </a:r>
+          </a:p>
+          <a:p>
+            <a:r>
+              <a:t/>
+            </a:r>
+          </a:p>
+          <a:p>
+            <a:r>
+              <a:t>CHECK AND EXPECTED ANSWER</a:t>
+            </a:r>
+          </a:p>
+          <a:p>
+            <a:r>
+              <a:t>One order has two lines. After joining orders to lines, how many rows for it? Two. Summing a repeated order-level total would double-count.</a:t>
+            </a:r>
+          </a:p>
+          <a:p>
+            <a:r>
+              <a:t/>
+            </a:r>
+          </a:p>
+          <a:p>
+            <a:r>
+              <a:t>IF LEARNERS ARE STUCK</a:t>
+            </a:r>
+          </a:p>
+          <a:p>
+            <a:r>
+              <a:t>Write one example row from each table. Circle keys and trace each match. Aggregate to the intended grain and check counts and totals.</a:t>
+            </a:r>
+          </a:p>
+          <a:p>
+            <a:r>
+              <a:t/>
+            </a:r>
+          </a:p>
+          <a:p>
+            <a:r>
+              <a:t>NEXT</a:t>
+            </a:r>
+          </a:p>
+          <a:p>
+            <a:r>
+              <a:t>Can you answer these?. Move on after a learner can explain the current example or required action.</a:t>
+            </a:r>
+          </a:p>
         </p:txBody>
       </p:sp>
       <p:sp>
@@ -1156,8 +1995,8 @@
 </p:notes>
 </file>
 
-<file path=ppt/notesSlides/notesSlide19.xml><?xml version="1.0" encoding="utf-8"?>
-<p:notes xmlns:a="http://schemas.openxmlformats.org/drawingml/2006/main" xmlns:p="http://schemas.openxmlformats.org/presentationml/2006/main" xmlns:r="http://schemas.openxmlformats.org/officeDocument/2006/relationships">
+<file path=ppt/notesSlides/notesSlide17.xml><?xml version="1.0" encoding="utf-8"?>
+<p:notes xmlns:a="http://schemas.openxmlformats.org/drawingml/2006/main" xmlns:p="http://schemas.openxmlformats.org/presentationml/2006/main">
   <p:cSld>
     <p:spTree>
       <p:nvGrpSpPr>
@@ -1201,7 +2040,157 @@
           <a:lstStyle/>
           <a:p>
             <a:r>
-              <a:t>This is Checkpoint 1 and it is marked against the answer key tonight. Build it as named steps and check the row count after each one.</a:t>
+              <a:t>TEACHING PURPOSE</a:t>
+            </a:r>
+          </a:p>
+          <a:p>
+            <a:r>
+              <a:t>Can you answer these?</a:t>
+            </a:r>
+          </a:p>
+          <a:p>
+            <a:r>
+              <a:t/>
+            </a:r>
+          </a:p>
+          <a:p>
+            <a:r>
+              <a:t>CONNECT</a:t>
+            </a:r>
+          </a:p>
+          <a:p>
+            <a:r>
+              <a:t>Build on the preceding slide: A join that multiplies rows. The total gets bigger and looks plausible, and the only tell is the row count..</a:t>
+            </a:r>
+          </a:p>
+          <a:p>
+            <a:r>
+              <a:t/>
+            </a:r>
+          </a:p>
+          <a:p>
+            <a:r>
+              <a:t>EXPLAIN IN ORDINARY WORDS</a:t>
+            </a:r>
+          </a:p>
+          <a:p>
+            <a:r>
+              <a:t>Grain means what one row represents. A key identifies a row; a primary key may use more than one column. A join matches keys, and multiple matches can multiply rows.</a:t>
+            </a:r>
+          </a:p>
+          <a:p>
+            <a:r>
+              <a:t/>
+            </a:r>
+          </a:p>
+          <a:p>
+            <a:r>
+              <a:t>CHECK AND EXPECTED ANSWER</a:t>
+            </a:r>
+          </a:p>
+          <a:p>
+            <a:r>
+              <a:t>One order has two lines. After joining orders to lines, how many rows for it? Two. Summing a repeated order-level total would double-count.</a:t>
+            </a:r>
+          </a:p>
+          <a:p>
+            <a:r>
+              <a:t/>
+            </a:r>
+          </a:p>
+          <a:p>
+            <a:r>
+              <a:t>IF LEARNERS ARE STUCK</a:t>
+            </a:r>
+          </a:p>
+          <a:p>
+            <a:r>
+              <a:t>Write one example row from each table. Circle keys and trace each match. Aggregate to the intended grain and check counts and totals.</a:t>
+            </a:r>
+          </a:p>
+          <a:p>
+            <a:r>
+              <a:t/>
+            </a:r>
+          </a:p>
+          <a:p>
+            <a:r>
+              <a:t>DISCUSSION KEY FOR THIS SLIDE</a:t>
+            </a:r>
+          </a:p>
+          <a:p>
+            <a:r>
+              <a:t>ANSWERS</a:t>
+            </a:r>
+          </a:p>
+          <a:p>
+            <a:r>
+              <a:t>How did you do?</a:t>
+            </a:r>
+          </a:p>
+          <a:p>
+            <a:r>
+              <a:t>A</a:t>
+            </a:r>
+          </a:p>
+          <a:p>
+            <a:r>
+              <a:t>Same count from INNER and LEFT</a:t>
+            </a:r>
+          </a:p>
+          <a:p>
+            <a:r>
+              <a:t>Every row on the left found a match, so on today's data the two are equivalent. That is a fact about these rows rather than about the tables, so re-check it when the data changes.</a:t>
+            </a:r>
+          </a:p>
+          <a:p>
+            <a:r>
+              <a:t>B</a:t>
+            </a:r>
+          </a:p>
+          <a:p>
+            <a:r>
+              <a:t>Summing a per-order figure after joining to lines</a:t>
+            </a:r>
+          </a:p>
+          <a:p>
+            <a:r>
+              <a:t>Fan-out. The order-level figure repeated once per line, so the total counted it several times: 6,000 orders became 20,234 rows. Aggregate the lines first, in their own step, then join.</a:t>
+            </a:r>
+          </a:p>
+          <a:p>
+            <a:r>
+              <a:t>C</a:t>
+            </a:r>
+          </a:p>
+          <a:p>
+            <a:r>
+              <a:t>Why CTEs rather than nesting</a:t>
+            </a:r>
+          </a:p>
+          <a:p>
+            <a:r>
+              <a:t>You can run a CTE on its own and check it. A nested subquery can only be checked as part of the whole thing, which means a mistake in the middle is the last one you find.</a:t>
+            </a:r>
+          </a:p>
+          <a:p>
+            <a:r>
+              <a:t>Let learners attempt first; use this to explain the reasoning, not just reveal the answer.</a:t>
+            </a:r>
+          </a:p>
+          <a:p>
+            <a:r>
+              <a:t/>
+            </a:r>
+          </a:p>
+          <a:p>
+            <a:r>
+              <a:t>NEXT</a:t>
+            </a:r>
+          </a:p>
+          <a:p>
+            <a:r>
+              <a:t>How did you do?. Move on after a learner can explain the current example or required action.</a:t>
             </a:r>
           </a:p>
         </p:txBody>
@@ -1226,8 +2215,8 @@
 </p:notes>
 </file>
 
-<file path=ppt/notesSlides/notesSlide2.xml><?xml version="1.0" encoding="utf-8"?>
-<p:notes xmlns:a="http://schemas.openxmlformats.org/drawingml/2006/main" xmlns:p="http://schemas.openxmlformats.org/presentationml/2006/main" xmlns:r="http://schemas.openxmlformats.org/officeDocument/2006/relationships">
+<file path=ppt/notesSlides/notesSlide18.xml><?xml version="1.0" encoding="utf-8"?>
+<p:notes xmlns:a="http://schemas.openxmlformats.org/drawingml/2006/main" xmlns:p="http://schemas.openxmlformats.org/presentationml/2006/main">
   <p:cSld>
     <p:spTree>
       <p:nvGrpSpPr>
@@ -1271,7 +2260,87 @@
           <a:lstStyle/>
           <a:p>
             <a:r>
-              <a:t>Tonight is session 5 of twelve.</a:t>
+              <a:t>TEACHING PURPOSE</a:t>
+            </a:r>
+          </a:p>
+          <a:p>
+            <a:r>
+              <a:t>How did you do?</a:t>
+            </a:r>
+          </a:p>
+          <a:p>
+            <a:r>
+              <a:t/>
+            </a:r>
+          </a:p>
+          <a:p>
+            <a:r>
+              <a:t>CONNECT</a:t>
+            </a:r>
+          </a:p>
+          <a:p>
+            <a:r>
+              <a:t>Build on the preceding slide: Can you answer these?.</a:t>
+            </a:r>
+          </a:p>
+          <a:p>
+            <a:r>
+              <a:t/>
+            </a:r>
+          </a:p>
+          <a:p>
+            <a:r>
+              <a:t>EXPLAIN IN ORDINARY WORDS</a:t>
+            </a:r>
+          </a:p>
+          <a:p>
+            <a:r>
+              <a:t>Grain means what one row represents. A key identifies a row; a primary key may use more than one column. A join matches keys, and multiple matches can multiply rows.</a:t>
+            </a:r>
+          </a:p>
+          <a:p>
+            <a:r>
+              <a:t/>
+            </a:r>
+          </a:p>
+          <a:p>
+            <a:r>
+              <a:t>CHECK AND EXPECTED ANSWER</a:t>
+            </a:r>
+          </a:p>
+          <a:p>
+            <a:r>
+              <a:t>One order has two lines. After joining orders to lines, how many rows for it? Two. Summing a repeated order-level total would double-count.</a:t>
+            </a:r>
+          </a:p>
+          <a:p>
+            <a:r>
+              <a:t/>
+            </a:r>
+          </a:p>
+          <a:p>
+            <a:r>
+              <a:t>IF LEARNERS ARE STUCK</a:t>
+            </a:r>
+          </a:p>
+          <a:p>
+            <a:r>
+              <a:t>Write one example row from each table. Circle keys and trace each match. Aggregate to the intended grain and check counts and totals.</a:t>
+            </a:r>
+          </a:p>
+          <a:p>
+            <a:r>
+              <a:t/>
+            </a:r>
+          </a:p>
+          <a:p>
+            <a:r>
+              <a:t>NEXT</a:t>
+            </a:r>
+          </a:p>
+          <a:p>
+            <a:r>
+              <a:t>Build the rep revenue report. Move on after a learner can explain the current example or required action.</a:t>
             </a:r>
           </a:p>
         </p:txBody>
@@ -1296,8 +2365,8 @@
 </p:notes>
 </file>
 
-<file path=ppt/notesSlides/notesSlide20.xml><?xml version="1.0" encoding="utf-8"?>
-<p:notes xmlns:a="http://schemas.openxmlformats.org/drawingml/2006/main" xmlns:p="http://schemas.openxmlformats.org/presentationml/2006/main" xmlns:r="http://schemas.openxmlformats.org/officeDocument/2006/relationships">
+<file path=ppt/notesSlides/notesSlide19.xml><?xml version="1.0" encoding="utf-8"?>
+<p:notes xmlns:a="http://schemas.openxmlformats.org/drawingml/2006/main" xmlns:p="http://schemas.openxmlformats.org/presentationml/2006/main">
   <p:cSld>
     <p:spTree>
       <p:nvGrpSpPr>
@@ -1339,7 +2408,106 @@
         <p:txBody>
           <a:bodyPr/>
           <a:lstStyle/>
-          <a:p/>
+          <a:p>
+            <a:r>
+              <a:t>TEACHING PURPOSE</a:t>
+            </a:r>
+          </a:p>
+          <a:p>
+            <a:r>
+              <a:t>Build the rep revenue report</a:t>
+            </a:r>
+          </a:p>
+          <a:p>
+            <a:r>
+              <a:t/>
+            </a:r>
+          </a:p>
+          <a:p>
+            <a:r>
+              <a:t>CONNECT</a:t>
+            </a:r>
+          </a:p>
+          <a:p>
+            <a:r>
+              <a:t>Build on the preceding slide: How did you do?.</a:t>
+            </a:r>
+          </a:p>
+          <a:p>
+            <a:r>
+              <a:t/>
+            </a:r>
+          </a:p>
+          <a:p>
+            <a:r>
+              <a:t>LECTURER CUE</a:t>
+            </a:r>
+          </a:p>
+          <a:p>
+            <a:r>
+              <a:t>This is Checkpoint 1 and it is marked against the answer key tonight. Build it as named steps and check the row count after each one.</a:t>
+            </a:r>
+          </a:p>
+          <a:p>
+            <a:r>
+              <a:t/>
+            </a:r>
+          </a:p>
+          <a:p>
+            <a:r>
+              <a:t>EXPLAIN IN ORDINARY WORDS</a:t>
+            </a:r>
+          </a:p>
+          <a:p>
+            <a:r>
+              <a:t>Grain means what one row represents. A key identifies a row; a primary key may use more than one column. A join matches keys, and multiple matches can multiply rows.</a:t>
+            </a:r>
+          </a:p>
+          <a:p>
+            <a:r>
+              <a:t/>
+            </a:r>
+          </a:p>
+          <a:p>
+            <a:r>
+              <a:t>CHECK AND EXPECTED ANSWER</a:t>
+            </a:r>
+          </a:p>
+          <a:p>
+            <a:r>
+              <a:t>One order has two lines. After joining orders to lines, how many rows for it? Two. Summing a repeated order-level total would double-count.</a:t>
+            </a:r>
+          </a:p>
+          <a:p>
+            <a:r>
+              <a:t/>
+            </a:r>
+          </a:p>
+          <a:p>
+            <a:r>
+              <a:t>IF LEARNERS ARE STUCK</a:t>
+            </a:r>
+          </a:p>
+          <a:p>
+            <a:r>
+              <a:t>Write one example row from each table. Circle keys and trace each match. Aggregate to the intended grain and check counts and totals.</a:t>
+            </a:r>
+          </a:p>
+          <a:p>
+            <a:r>
+              <a:t/>
+            </a:r>
+          </a:p>
+          <a:p>
+            <a:r>
+              <a:t>NEXT</a:t>
+            </a:r>
+          </a:p>
+          <a:p>
+            <a:r>
+              <a:t>What you can do now. Move on after a learner can explain the current example or required action.</a:t>
+            </a:r>
+          </a:p>
         </p:txBody>
       </p:sp>
       <p:sp>
@@ -1362,8 +2530,8 @@
 </p:notes>
 </file>
 
-<file path=ppt/notesSlides/notesSlide21.xml><?xml version="1.0" encoding="utf-8"?>
-<p:notes xmlns:a="http://schemas.openxmlformats.org/drawingml/2006/main" xmlns:p="http://schemas.openxmlformats.org/presentationml/2006/main" xmlns:r="http://schemas.openxmlformats.org/officeDocument/2006/relationships">
+<file path=ppt/notesSlides/notesSlide2.xml><?xml version="1.0" encoding="utf-8"?>
+<p:notes xmlns:a="http://schemas.openxmlformats.org/drawingml/2006/main" xmlns:p="http://schemas.openxmlformats.org/presentationml/2006/main">
   <p:cSld>
     <p:spTree>
       <p:nvGrpSpPr>
@@ -1407,7 +2575,102 @@
           <a:lstStyle/>
           <a:p>
             <a:r>
-              <a:t>Finish the report if it is not finished, then break it on purpose: change one LEFT JOIN to an INNER JOIN and write down what changed in the numbers and why.</a:t>
+              <a:t>TEACHING PURPOSE</a:t>
+            </a:r>
+          </a:p>
+          <a:p>
+            <a:r>
+              <a:t>Where tonight sits</a:t>
+            </a:r>
+          </a:p>
+          <a:p>
+            <a:r>
+              <a:t/>
+            </a:r>
+          </a:p>
+          <a:p>
+            <a:r>
+              <a:t>CONNECT</a:t>
+            </a:r>
+          </a:p>
+          <a:p>
+            <a:r>
+              <a:t>Build on the preceding slide: Joining tables, carefully.</a:t>
+            </a:r>
+          </a:p>
+          <a:p>
+            <a:r>
+              <a:t/>
+            </a:r>
+          </a:p>
+          <a:p>
+            <a:r>
+              <a:t>LECTURER CUE</a:t>
+            </a:r>
+          </a:p>
+          <a:p>
+            <a:r>
+              <a:t>Tonight is session 5 of fifteen.</a:t>
+            </a:r>
+          </a:p>
+          <a:p>
+            <a:r>
+              <a:t/>
+            </a:r>
+          </a:p>
+          <a:p>
+            <a:r>
+              <a:t>EXPLAIN IN ORDINARY WORDS</a:t>
+            </a:r>
+          </a:p>
+          <a:p>
+            <a:r>
+              <a:t>Grain means what one row represents. A key identifies a row; a primary key may use more than one column. A join matches keys, and multiple matches can multiply rows.</a:t>
+            </a:r>
+          </a:p>
+          <a:p>
+            <a:r>
+              <a:t/>
+            </a:r>
+          </a:p>
+          <a:p>
+            <a:r>
+              <a:t>CHECK AND EXPECTED ANSWER</a:t>
+            </a:r>
+          </a:p>
+          <a:p>
+            <a:r>
+              <a:t>One order has two lines. After joining orders to lines, how many rows for it? Two. Summing a repeated order-level total would double-count.</a:t>
+            </a:r>
+          </a:p>
+          <a:p>
+            <a:r>
+              <a:t/>
+            </a:r>
+          </a:p>
+          <a:p>
+            <a:r>
+              <a:t>IF LEARNERS ARE STUCK</a:t>
+            </a:r>
+          </a:p>
+          <a:p>
+            <a:r>
+              <a:t>Write one example row from each table. Circle keys and trace each match. Aggregate to the intended grain and check counts and totals.</a:t>
+            </a:r>
+          </a:p>
+          <a:p>
+            <a:r>
+              <a:t/>
+            </a:r>
+          </a:p>
+          <a:p>
+            <a:r>
+              <a:t>NEXT</a:t>
+            </a:r>
+          </a:p>
+          <a:p>
+            <a:r>
+              <a:t>The words for tonight. Move on after a learner can explain the current example or required action.</a:t>
             </a:r>
           </a:p>
         </p:txBody>
@@ -1432,8 +2695,8 @@
 </p:notes>
 </file>
 
-<file path=ppt/notesSlides/notesSlide22.xml><?xml version="1.0" encoding="utf-8"?>
-<p:notes xmlns:a="http://schemas.openxmlformats.org/drawingml/2006/main" xmlns:p="http://schemas.openxmlformats.org/presentationml/2006/main" xmlns:r="http://schemas.openxmlformats.org/officeDocument/2006/relationships">
+<file path=ppt/notesSlides/notesSlide20.xml><?xml version="1.0" encoding="utf-8"?>
+<p:notes xmlns:a="http://schemas.openxmlformats.org/drawingml/2006/main" xmlns:p="http://schemas.openxmlformats.org/presentationml/2006/main">
   <p:cSld>
     <p:spTree>
       <p:nvGrpSpPr>
@@ -1477,7 +2740,87 @@
           <a:lstStyle/>
           <a:p>
             <a:r>
-              <a:t>Every error in this session announced itself the same way: a count that changed when you did not expect it to. Nothing else warns you, so build the habit now while the data is still small enough to check by hand.</a:t>
+              <a:t>TEACHING PURPOSE</a:t>
+            </a:r>
+          </a:p>
+          <a:p>
+            <a:r>
+              <a:t>What you can do now</a:t>
+            </a:r>
+          </a:p>
+          <a:p>
+            <a:r>
+              <a:t/>
+            </a:r>
+          </a:p>
+          <a:p>
+            <a:r>
+              <a:t>CONNECT</a:t>
+            </a:r>
+          </a:p>
+          <a:p>
+            <a:r>
+              <a:t>Build on the preceding slide: Build the rep revenue report.</a:t>
+            </a:r>
+          </a:p>
+          <a:p>
+            <a:r>
+              <a:t/>
+            </a:r>
+          </a:p>
+          <a:p>
+            <a:r>
+              <a:t>EXPLAIN IN ORDINARY WORDS</a:t>
+            </a:r>
+          </a:p>
+          <a:p>
+            <a:r>
+              <a:t>Grain means what one row represents. A key identifies a row; a primary key may use more than one column. A join matches keys, and multiple matches can multiply rows.</a:t>
+            </a:r>
+          </a:p>
+          <a:p>
+            <a:r>
+              <a:t/>
+            </a:r>
+          </a:p>
+          <a:p>
+            <a:r>
+              <a:t>CHECK AND EXPECTED ANSWER</a:t>
+            </a:r>
+          </a:p>
+          <a:p>
+            <a:r>
+              <a:t>One order has two lines. After joining orders to lines, how many rows for it? Two. Summing a repeated order-level total would double-count.</a:t>
+            </a:r>
+          </a:p>
+          <a:p>
+            <a:r>
+              <a:t/>
+            </a:r>
+          </a:p>
+          <a:p>
+            <a:r>
+              <a:t>IF LEARNERS ARE STUCK</a:t>
+            </a:r>
+          </a:p>
+          <a:p>
+            <a:r>
+              <a:t>Write one example row from each table. Circle keys and trace each match. Aggregate to the intended grain and check counts and totals.</a:t>
+            </a:r>
+          </a:p>
+          <a:p>
+            <a:r>
+              <a:t/>
+            </a:r>
+          </a:p>
+          <a:p>
+            <a:r>
+              <a:t>NEXT</a:t>
+            </a:r>
+          </a:p>
+          <a:p>
+            <a:r>
+              <a:t>Before the next session. Move on after a learner can explain the current example or required action.</a:t>
             </a:r>
           </a:p>
         </p:txBody>
@@ -1502,8 +2845,8 @@
 </p:notes>
 </file>
 
-<file path=ppt/notesSlides/notesSlide3.xml><?xml version="1.0" encoding="utf-8"?>
-<p:notes xmlns:a="http://schemas.openxmlformats.org/drawingml/2006/main" xmlns:p="http://schemas.openxmlformats.org/presentationml/2006/main" xmlns:r="http://schemas.openxmlformats.org/officeDocument/2006/relationships">
+<file path=ppt/notesSlides/notesSlide21.xml><?xml version="1.0" encoding="utf-8"?>
+<p:notes xmlns:a="http://schemas.openxmlformats.org/drawingml/2006/main" xmlns:p="http://schemas.openxmlformats.org/presentationml/2006/main">
   <p:cSld>
     <p:spTree>
       <p:nvGrpSpPr>
@@ -1545,7 +2888,106 @@
         <p:txBody>
           <a:bodyPr/>
           <a:lstStyle/>
-          <a:p/>
+          <a:p>
+            <a:r>
+              <a:t>TEACHING PURPOSE</a:t>
+            </a:r>
+          </a:p>
+          <a:p>
+            <a:r>
+              <a:t>Before the next session</a:t>
+            </a:r>
+          </a:p>
+          <a:p>
+            <a:r>
+              <a:t/>
+            </a:r>
+          </a:p>
+          <a:p>
+            <a:r>
+              <a:t>CONNECT</a:t>
+            </a:r>
+          </a:p>
+          <a:p>
+            <a:r>
+              <a:t>Build on the preceding slide: What you can do now.</a:t>
+            </a:r>
+          </a:p>
+          <a:p>
+            <a:r>
+              <a:t/>
+            </a:r>
+          </a:p>
+          <a:p>
+            <a:r>
+              <a:t>LECTURER CUE</a:t>
+            </a:r>
+          </a:p>
+          <a:p>
+            <a:r>
+              <a:t>Finish the report if it is not finished, then break it on purpose: change one LEFT JOIN to an INNER JOIN and write down what changed in the numbers and why.</a:t>
+            </a:r>
+          </a:p>
+          <a:p>
+            <a:r>
+              <a:t/>
+            </a:r>
+          </a:p>
+          <a:p>
+            <a:r>
+              <a:t>EXPLAIN IN ORDINARY WORDS</a:t>
+            </a:r>
+          </a:p>
+          <a:p>
+            <a:r>
+              <a:t>Grain means what one row represents. A key identifies a row; a primary key may use more than one column. A join matches keys, and multiple matches can multiply rows.</a:t>
+            </a:r>
+          </a:p>
+          <a:p>
+            <a:r>
+              <a:t/>
+            </a:r>
+          </a:p>
+          <a:p>
+            <a:r>
+              <a:t>CHECK AND EXPECTED ANSWER</a:t>
+            </a:r>
+          </a:p>
+          <a:p>
+            <a:r>
+              <a:t>One order has two lines. After joining orders to lines, how many rows for it? Two. Summing a repeated order-level total would double-count.</a:t>
+            </a:r>
+          </a:p>
+          <a:p>
+            <a:r>
+              <a:t/>
+            </a:r>
+          </a:p>
+          <a:p>
+            <a:r>
+              <a:t>IF LEARNERS ARE STUCK</a:t>
+            </a:r>
+          </a:p>
+          <a:p>
+            <a:r>
+              <a:t>Write one example row from each table. Circle keys and trace each match. Aggregate to the intended grain and check counts and totals.</a:t>
+            </a:r>
+          </a:p>
+          <a:p>
+            <a:r>
+              <a:t/>
+            </a:r>
+          </a:p>
+          <a:p>
+            <a:r>
+              <a:t>NEXT</a:t>
+            </a:r>
+          </a:p>
+          <a:p>
+            <a:r>
+              <a:t>The row count is the smoke alarm. Move on after a learner can explain the current example or required action.</a:t>
+            </a:r>
+          </a:p>
         </p:txBody>
       </p:sp>
       <p:sp>
@@ -1568,8 +3010,8 @@
 </p:notes>
 </file>
 
-<file path=ppt/notesSlides/notesSlide4.xml><?xml version="1.0" encoding="utf-8"?>
-<p:notes xmlns:a="http://schemas.openxmlformats.org/drawingml/2006/main" xmlns:p="http://schemas.openxmlformats.org/presentationml/2006/main" xmlns:r="http://schemas.openxmlformats.org/officeDocument/2006/relationships">
+<file path=ppt/notesSlides/notesSlide22.xml><?xml version="1.0" encoding="utf-8"?>
+<p:notes xmlns:a="http://schemas.openxmlformats.org/drawingml/2006/main" xmlns:p="http://schemas.openxmlformats.org/presentationml/2006/main">
   <p:cSld>
     <p:spTree>
       <p:nvGrpSpPr>
@@ -1613,7 +3055,42 @@
           <a:lstStyle/>
           <a:p>
             <a:r>
-              <a:t>These three are what tonight is marked against, in the sense that the lab checks them.</a:t>
+              <a:t>TEACHING PURPOSE</a:t>
+            </a:r>
+          </a:p>
+          <a:p>
+            <a:r>
+              <a:t>The row count is the smoke alarm</a:t>
+            </a:r>
+          </a:p>
+          <a:p>
+            <a:r>
+              <a:t/>
+            </a:r>
+          </a:p>
+          <a:p>
+            <a:r>
+              <a:t>CONNECT</a:t>
+            </a:r>
+          </a:p>
+          <a:p>
+            <a:r>
+              <a:t>Build on the preceding slide: Before the next session.</a:t>
+            </a:r>
+          </a:p>
+          <a:p>
+            <a:r>
+              <a:t/>
+            </a:r>
+          </a:p>
+          <a:p>
+            <a:r>
+              <a:t>LECTURER CUE</a:t>
+            </a:r>
+          </a:p>
+          <a:p>
+            <a:r>
+              <a:t>Every error in this session announced itself the same way: a count that changed when you did not expect it to. Nothing else warns you, so build the habit now while the data is still small enough to check by hand.</a:t>
             </a:r>
           </a:p>
         </p:txBody>
@@ -1638,8 +3115,8 @@
 </p:notes>
 </file>
 
-<file path=ppt/notesSlides/notesSlide5.xml><?xml version="1.0" encoding="utf-8"?>
-<p:notes xmlns:a="http://schemas.openxmlformats.org/drawingml/2006/main" xmlns:p="http://schemas.openxmlformats.org/presentationml/2006/main" xmlns:r="http://schemas.openxmlformats.org/officeDocument/2006/relationships">
+<file path=ppt/notesSlides/notesSlide3.xml><?xml version="1.0" encoding="utf-8"?>
+<p:notes xmlns:a="http://schemas.openxmlformats.org/drawingml/2006/main" xmlns:p="http://schemas.openxmlformats.org/presentationml/2006/main">
   <p:cSld>
     <p:spTree>
       <p:nvGrpSpPr>
@@ -1683,7 +3160,87 @@
           <a:lstStyle/>
           <a:p>
             <a:r>
-              <a:t>Yes, and it is wrong. A join can multiply rows, and nothing warns you except a row count you were not watching.</a:t>
+              <a:t>TEACHING PURPOSE</a:t>
+            </a:r>
+          </a:p>
+          <a:p>
+            <a:r>
+              <a:t>The words for tonight</a:t>
+            </a:r>
+          </a:p>
+          <a:p>
+            <a:r>
+              <a:t/>
+            </a:r>
+          </a:p>
+          <a:p>
+            <a:r>
+              <a:t>CONNECT</a:t>
+            </a:r>
+          </a:p>
+          <a:p>
+            <a:r>
+              <a:t>Build on the preceding slide: Where tonight sits.</a:t>
+            </a:r>
+          </a:p>
+          <a:p>
+            <a:r>
+              <a:t/>
+            </a:r>
+          </a:p>
+          <a:p>
+            <a:r>
+              <a:t>EXPLAIN IN ORDINARY WORDS</a:t>
+            </a:r>
+          </a:p>
+          <a:p>
+            <a:r>
+              <a:t>Grain means what one row represents. A key identifies a row; a primary key may use more than one column. A join matches keys, and multiple matches can multiply rows.</a:t>
+            </a:r>
+          </a:p>
+          <a:p>
+            <a:r>
+              <a:t/>
+            </a:r>
+          </a:p>
+          <a:p>
+            <a:r>
+              <a:t>CHECK AND EXPECTED ANSWER</a:t>
+            </a:r>
+          </a:p>
+          <a:p>
+            <a:r>
+              <a:t>One order has two lines. After joining orders to lines, how many rows for it? Two. Summing a repeated order-level total would double-count.</a:t>
+            </a:r>
+          </a:p>
+          <a:p>
+            <a:r>
+              <a:t/>
+            </a:r>
+          </a:p>
+          <a:p>
+            <a:r>
+              <a:t>IF LEARNERS ARE STUCK</a:t>
+            </a:r>
+          </a:p>
+          <a:p>
+            <a:r>
+              <a:t>Write one example row from each table. Circle keys and trace each match. Aggregate to the intended grain and check counts and totals.</a:t>
+            </a:r>
+          </a:p>
+          <a:p>
+            <a:r>
+              <a:t/>
+            </a:r>
+          </a:p>
+          <a:p>
+            <a:r>
+              <a:t>NEXT</a:t>
+            </a:r>
+          </a:p>
+          <a:p>
+            <a:r>
+              <a:t>By the end of tonight you can…. Move on after a learner can explain the current example or required action.</a:t>
             </a:r>
           </a:p>
         </p:txBody>
@@ -1708,8 +3265,8 @@
 </p:notes>
 </file>
 
-<file path=ppt/notesSlides/notesSlide6.xml><?xml version="1.0" encoding="utf-8"?>
-<p:notes xmlns:a="http://schemas.openxmlformats.org/drawingml/2006/main" xmlns:p="http://schemas.openxmlformats.org/presentationml/2006/main" xmlns:r="http://schemas.openxmlformats.org/officeDocument/2006/relationships">
+<file path=ppt/notesSlides/notesSlide4.xml><?xml version="1.0" encoding="utf-8"?>
+<p:notes xmlns:a="http://schemas.openxmlformats.org/drawingml/2006/main" xmlns:p="http://schemas.openxmlformats.org/presentationml/2006/main">
   <p:cSld>
     <p:spTree>
       <p:nvGrpSpPr>
@@ -1753,7 +3310,102 @@
           <a:lstStyle/>
           <a:p>
             <a:r>
-              <a:t>Keep only the rows that matched on both sides. Anything without a match disappears, with no message.</a:t>
+              <a:t>TEACHING PURPOSE</a:t>
+            </a:r>
+          </a:p>
+          <a:p>
+            <a:r>
+              <a:t>By the end of tonight you can…</a:t>
+            </a:r>
+          </a:p>
+          <a:p>
+            <a:r>
+              <a:t/>
+            </a:r>
+          </a:p>
+          <a:p>
+            <a:r>
+              <a:t>CONNECT</a:t>
+            </a:r>
+          </a:p>
+          <a:p>
+            <a:r>
+              <a:t>Build on the preceding slide: The words for tonight.</a:t>
+            </a:r>
+          </a:p>
+          <a:p>
+            <a:r>
+              <a:t/>
+            </a:r>
+          </a:p>
+          <a:p>
+            <a:r>
+              <a:t>LECTURER CUE</a:t>
+            </a:r>
+          </a:p>
+          <a:p>
+            <a:r>
+              <a:t>These three are what tonight is marked against, in the sense that the lab checks them.</a:t>
+            </a:r>
+          </a:p>
+          <a:p>
+            <a:r>
+              <a:t/>
+            </a:r>
+          </a:p>
+          <a:p>
+            <a:r>
+              <a:t>EXPLAIN IN ORDINARY WORDS</a:t>
+            </a:r>
+          </a:p>
+          <a:p>
+            <a:r>
+              <a:t>Grain means what one row represents. A key identifies a row; a primary key may use more than one column. A join matches keys, and multiple matches can multiply rows.</a:t>
+            </a:r>
+          </a:p>
+          <a:p>
+            <a:r>
+              <a:t/>
+            </a:r>
+          </a:p>
+          <a:p>
+            <a:r>
+              <a:t>CHECK AND EXPECTED ANSWER</a:t>
+            </a:r>
+          </a:p>
+          <a:p>
+            <a:r>
+              <a:t>One order has two lines. After joining orders to lines, how many rows for it? Two. Summing a repeated order-level total would double-count.</a:t>
+            </a:r>
+          </a:p>
+          <a:p>
+            <a:r>
+              <a:t/>
+            </a:r>
+          </a:p>
+          <a:p>
+            <a:r>
+              <a:t>IF LEARNERS ARE STUCK</a:t>
+            </a:r>
+          </a:p>
+          <a:p>
+            <a:r>
+              <a:t>Write one example row from each table. Circle keys and trace each match. Aggregate to the intended grain and check counts and totals.</a:t>
+            </a:r>
+          </a:p>
+          <a:p>
+            <a:r>
+              <a:t/>
+            </a:r>
+          </a:p>
+          <a:p>
+            <a:r>
+              <a:t>NEXT</a:t>
+            </a:r>
+          </a:p>
+          <a:p>
+            <a:r>
+              <a:t>Your total went up when you joined a table.. Move on after a learner can explain the current example or required action.</a:t>
             </a:r>
           </a:p>
         </p:txBody>
@@ -1778,8 +3430,8 @@
 </p:notes>
 </file>
 
-<file path=ppt/notesSlides/notesSlide7.xml><?xml version="1.0" encoding="utf-8"?>
-<p:notes xmlns:a="http://schemas.openxmlformats.org/drawingml/2006/main" xmlns:p="http://schemas.openxmlformats.org/presentationml/2006/main" xmlns:r="http://schemas.openxmlformats.org/officeDocument/2006/relationships">
+<file path=ppt/notesSlides/notesSlide5.xml><?xml version="1.0" encoding="utf-8"?>
+<p:notes xmlns:a="http://schemas.openxmlformats.org/drawingml/2006/main" xmlns:p="http://schemas.openxmlformats.org/presentationml/2006/main">
   <p:cSld>
     <p:spTree>
       <p:nvGrpSpPr>
@@ -1823,7 +3475,102 @@
           <a:lstStyle/>
           <a:p>
             <a:r>
-              <a:t>Keep every row on the left, and leave the right-hand columns empty where nothing matched.</a:t>
+              <a:t>TEACHING PURPOSE</a:t>
+            </a:r>
+          </a:p>
+          <a:p>
+            <a:r>
+              <a:t>Your total went up when you joined a table.</a:t>
+            </a:r>
+          </a:p>
+          <a:p>
+            <a:r>
+              <a:t/>
+            </a:r>
+          </a:p>
+          <a:p>
+            <a:r>
+              <a:t>CONNECT</a:t>
+            </a:r>
+          </a:p>
+          <a:p>
+            <a:r>
+              <a:t>Build on the preceding slide: By the end of tonight you can….</a:t>
+            </a:r>
+          </a:p>
+          <a:p>
+            <a:r>
+              <a:t/>
+            </a:r>
+          </a:p>
+          <a:p>
+            <a:r>
+              <a:t>LECTURER CUE</a:t>
+            </a:r>
+          </a:p>
+          <a:p>
+            <a:r>
+              <a:t>Yes, and it is wrong. A join can multiply rows, and nothing warns you except a row count you were not watching.</a:t>
+            </a:r>
+          </a:p>
+          <a:p>
+            <a:r>
+              <a:t/>
+            </a:r>
+          </a:p>
+          <a:p>
+            <a:r>
+              <a:t>EXPLAIN IN ORDINARY WORDS</a:t>
+            </a:r>
+          </a:p>
+          <a:p>
+            <a:r>
+              <a:t>Grain means what one row represents. A key identifies a row; a primary key may use more than one column. A join matches keys, and multiple matches can multiply rows.</a:t>
+            </a:r>
+          </a:p>
+          <a:p>
+            <a:r>
+              <a:t/>
+            </a:r>
+          </a:p>
+          <a:p>
+            <a:r>
+              <a:t>CHECK AND EXPECTED ANSWER</a:t>
+            </a:r>
+          </a:p>
+          <a:p>
+            <a:r>
+              <a:t>One order has two lines. After joining orders to lines, how many rows for it? Two. Summing a repeated order-level total would double-count.</a:t>
+            </a:r>
+          </a:p>
+          <a:p>
+            <a:r>
+              <a:t/>
+            </a:r>
+          </a:p>
+          <a:p>
+            <a:r>
+              <a:t>IF LEARNERS ARE STUCK</a:t>
+            </a:r>
+          </a:p>
+          <a:p>
+            <a:r>
+              <a:t>Write one example row from each table. Circle keys and trace each match. Aggregate to the intended grain and check counts and totals.</a:t>
+            </a:r>
+          </a:p>
+          <a:p>
+            <a:r>
+              <a:t/>
+            </a:r>
+          </a:p>
+          <a:p>
+            <a:r>
+              <a:t>NEXT</a:t>
+            </a:r>
+          </a:p>
+          <a:p>
+            <a:r>
+              <a:t>INNER and LEFT, and the row count that tells you. Move on after a learner can explain the current example or required action.</a:t>
             </a:r>
           </a:p>
         </p:txBody>
@@ -1848,8 +3595,8 @@
 </p:notes>
 </file>
 
-<file path=ppt/notesSlides/notesSlide8.xml><?xml version="1.0" encoding="utf-8"?>
-<p:notes xmlns:a="http://schemas.openxmlformats.org/drawingml/2006/main" xmlns:p="http://schemas.openxmlformats.org/presentationml/2006/main" xmlns:r="http://schemas.openxmlformats.org/officeDocument/2006/relationships">
+<file path=ppt/notesSlides/notesSlide6.xml><?xml version="1.0" encoding="utf-8"?>
+<p:notes xmlns:a="http://schemas.openxmlformats.org/drawingml/2006/main" xmlns:p="http://schemas.openxmlformats.org/presentationml/2006/main">
   <p:cSld>
     <p:spTree>
       <p:nvGrpSpPr>
@@ -1893,7 +3640,102 @@
           <a:lstStyle/>
           <a:p>
             <a:r>
-              <a:t>When one row matches several rows, its values are repeated once per match. Sum them afterwards and you have counted the same thing several times.</a:t>
+              <a:t>TEACHING PURPOSE</a:t>
+            </a:r>
+          </a:p>
+          <a:p>
+            <a:r>
+              <a:t>INNER JOIN</a:t>
+            </a:r>
+          </a:p>
+          <a:p>
+            <a:r>
+              <a:t/>
+            </a:r>
+          </a:p>
+          <a:p>
+            <a:r>
+              <a:t>CONNECT</a:t>
+            </a:r>
+          </a:p>
+          <a:p>
+            <a:r>
+              <a:t>Build on the preceding slide: INNER and LEFT, and the row count that tells you.</a:t>
+            </a:r>
+          </a:p>
+          <a:p>
+            <a:r>
+              <a:t/>
+            </a:r>
+          </a:p>
+          <a:p>
+            <a:r>
+              <a:t>LECTURER CUE</a:t>
+            </a:r>
+          </a:p>
+          <a:p>
+            <a:r>
+              <a:t>Keep only the rows that matched on both sides. Anything without a match disappears, with no message.</a:t>
+            </a:r>
+          </a:p>
+          <a:p>
+            <a:r>
+              <a:t/>
+            </a:r>
+          </a:p>
+          <a:p>
+            <a:r>
+              <a:t>EXPLAIN IN ORDINARY WORDS</a:t>
+            </a:r>
+          </a:p>
+          <a:p>
+            <a:r>
+              <a:t>Grain means what one row represents. A key identifies a row; a primary key may use more than one column. A join matches keys, and multiple matches can multiply rows.</a:t>
+            </a:r>
+          </a:p>
+          <a:p>
+            <a:r>
+              <a:t/>
+            </a:r>
+          </a:p>
+          <a:p>
+            <a:r>
+              <a:t>CHECK AND EXPECTED ANSWER</a:t>
+            </a:r>
+          </a:p>
+          <a:p>
+            <a:r>
+              <a:t>One order has two lines. After joining orders to lines, how many rows for it? Two. Summing a repeated order-level total would double-count.</a:t>
+            </a:r>
+          </a:p>
+          <a:p>
+            <a:r>
+              <a:t/>
+            </a:r>
+          </a:p>
+          <a:p>
+            <a:r>
+              <a:t>IF LEARNERS ARE STUCK</a:t>
+            </a:r>
+          </a:p>
+          <a:p>
+            <a:r>
+              <a:t>Write one example row from each table. Circle keys and trace each match. Aggregate to the intended grain and check counts and totals.</a:t>
+            </a:r>
+          </a:p>
+          <a:p>
+            <a:r>
+              <a:t/>
+            </a:r>
+          </a:p>
+          <a:p>
+            <a:r>
+              <a:t>NEXT</a:t>
+            </a:r>
+          </a:p>
+          <a:p>
+            <a:r>
+              <a:t>LEFT JOIN. Move on after a learner can explain the current example or required action.</a:t>
             </a:r>
           </a:p>
         </p:txBody>
@@ -1918,8 +3760,8 @@
 </p:notes>
 </file>
 
-<file path=ppt/notesSlides/notesSlide9.xml><?xml version="1.0" encoding="utf-8"?>
-<p:notes xmlns:a="http://schemas.openxmlformats.org/drawingml/2006/main" xmlns:p="http://schemas.openxmlformats.org/presentationml/2006/main" xmlns:r="http://schemas.openxmlformats.org/officeDocument/2006/relationships">
+<file path=ppt/notesSlides/notesSlide7.xml><?xml version="1.0" encoding="utf-8"?>
+<p:notes xmlns:a="http://schemas.openxmlformats.org/drawingml/2006/main" xmlns:p="http://schemas.openxmlformats.org/presentationml/2006/main">
   <p:cSld>
     <p:spTree>
       <p:nvGrpSpPr>
@@ -1963,7 +3805,432 @@
           <a:lstStyle/>
           <a:p>
             <a:r>
+              <a:t>TEACHING PURPOSE</a:t>
+            </a:r>
+          </a:p>
+          <a:p>
+            <a:r>
+              <a:t>LEFT JOIN</a:t>
+            </a:r>
+          </a:p>
+          <a:p>
+            <a:r>
+              <a:t/>
+            </a:r>
+          </a:p>
+          <a:p>
+            <a:r>
+              <a:t>CONNECT</a:t>
+            </a:r>
+          </a:p>
+          <a:p>
+            <a:r>
+              <a:t>Build on the preceding slide: INNER JOIN.</a:t>
+            </a:r>
+          </a:p>
+          <a:p>
+            <a:r>
+              <a:t/>
+            </a:r>
+          </a:p>
+          <a:p>
+            <a:r>
+              <a:t>LECTURER CUE</a:t>
+            </a:r>
+          </a:p>
+          <a:p>
+            <a:r>
+              <a:t>Keep every row on the left, and leave the right-hand columns empty where nothing matched.</a:t>
+            </a:r>
+          </a:p>
+          <a:p>
+            <a:r>
+              <a:t/>
+            </a:r>
+          </a:p>
+          <a:p>
+            <a:r>
+              <a:t>EXPLAIN IN ORDINARY WORDS</a:t>
+            </a:r>
+          </a:p>
+          <a:p>
+            <a:r>
+              <a:t>Grain means what one row represents. A key identifies a row; a primary key may use more than one column. A join matches keys, and multiple matches can multiply rows.</a:t>
+            </a:r>
+          </a:p>
+          <a:p>
+            <a:r>
+              <a:t/>
+            </a:r>
+          </a:p>
+          <a:p>
+            <a:r>
+              <a:t>CHECK AND EXPECTED ANSWER</a:t>
+            </a:r>
+          </a:p>
+          <a:p>
+            <a:r>
+              <a:t>One order has two lines. After joining orders to lines, how many rows for it? Two. Summing a repeated order-level total would double-count.</a:t>
+            </a:r>
+          </a:p>
+          <a:p>
+            <a:r>
+              <a:t/>
+            </a:r>
+          </a:p>
+          <a:p>
+            <a:r>
+              <a:t>IF LEARNERS ARE STUCK</a:t>
+            </a:r>
+          </a:p>
+          <a:p>
+            <a:r>
+              <a:t>Write one example row from each table. Circle keys and trace each match. Aggregate to the intended grain and check counts and totals.</a:t>
+            </a:r>
+          </a:p>
+          <a:p>
+            <a:r>
+              <a:t/>
+            </a:r>
+          </a:p>
+          <a:p>
+            <a:r>
+              <a:t>NEXT</a:t>
+            </a:r>
+          </a:p>
+          <a:p>
+            <a:r>
+              <a:t>Fan-out. Move on after a learner can explain the current example or required action.</a:t>
+            </a:r>
+          </a:p>
+        </p:txBody>
+      </p:sp>
+      <p:sp>
+        <p:nvSpPr>
+          <p:cNvPr id="4" name="Slide Number Placeholder 3"/>
+          <p:cNvSpPr>
+            <a:spLocks noGrp="1"/>
+          </p:cNvSpPr>
+          <p:nvPr>
+            <p:ph type="sldNum" idx="5" sz="quarter"/>
+          </p:nvPr>
+        </p:nvSpPr>
+        <p:spPr/>
+      </p:sp>
+    </p:spTree>
+  </p:cSld>
+  <p:clrMapOvr>
+    <a:masterClrMapping/>
+  </p:clrMapOvr>
+</p:notes>
+</file>
+
+<file path=ppt/notesSlides/notesSlide8.xml><?xml version="1.0" encoding="utf-8"?>
+<p:notes xmlns:a="http://schemas.openxmlformats.org/drawingml/2006/main" xmlns:p="http://schemas.openxmlformats.org/presentationml/2006/main">
+  <p:cSld>
+    <p:spTree>
+      <p:nvGrpSpPr>
+        <p:cNvPr id="1" name=""/>
+        <p:cNvGrpSpPr/>
+        <p:nvPr/>
+      </p:nvGrpSpPr>
+      <p:grpSpPr>
+        <a:xfrm>
+          <a:off x="0" y="0"/>
+          <a:ext cx="0" cy="0"/>
+          <a:chOff x="0" y="0"/>
+          <a:chExt cx="0" cy="0"/>
+        </a:xfrm>
+      </p:grpSpPr>
+      <p:sp>
+        <p:nvSpPr>
+          <p:cNvPr id="2" name="Slide Image Placeholder 1"/>
+          <p:cNvSpPr>
+            <a:spLocks noGrp="1"/>
+          </p:cNvSpPr>
+          <p:nvPr>
+            <p:ph type="sldImg" idx="2"/>
+          </p:nvPr>
+        </p:nvSpPr>
+        <p:spPr/>
+      </p:sp>
+      <p:sp>
+        <p:nvSpPr>
+          <p:cNvPr id="3" name="Notes Placeholder 2"/>
+          <p:cNvSpPr>
+            <a:spLocks noGrp="1"/>
+          </p:cNvSpPr>
+          <p:nvPr>
+            <p:ph type="body" idx="3" sz="quarter"/>
+          </p:nvPr>
+        </p:nvSpPr>
+        <p:spPr/>
+        <p:txBody>
+          <a:bodyPr/>
+          <a:lstStyle/>
+          <a:p>
+            <a:r>
+              <a:t>TEACHING PURPOSE</a:t>
+            </a:r>
+          </a:p>
+          <a:p>
+            <a:r>
+              <a:t>Fan-out</a:t>
+            </a:r>
+          </a:p>
+          <a:p>
+            <a:r>
+              <a:t/>
+            </a:r>
+          </a:p>
+          <a:p>
+            <a:r>
+              <a:t>CONNECT</a:t>
+            </a:r>
+          </a:p>
+          <a:p>
+            <a:r>
+              <a:t>Build on the preceding slide: LEFT JOIN.</a:t>
+            </a:r>
+          </a:p>
+          <a:p>
+            <a:r>
+              <a:t/>
+            </a:r>
+          </a:p>
+          <a:p>
+            <a:r>
+              <a:t>LECTURER CUE</a:t>
+            </a:r>
+          </a:p>
+          <a:p>
+            <a:r>
+              <a:t>When one row matches several rows, its values are repeated once per match. Sum them afterwards and you have counted the same thing several times.</a:t>
+            </a:r>
+          </a:p>
+          <a:p>
+            <a:r>
+              <a:t/>
+            </a:r>
+          </a:p>
+          <a:p>
+            <a:r>
+              <a:t>EXPLAIN IN ORDINARY WORDS</a:t>
+            </a:r>
+          </a:p>
+          <a:p>
+            <a:r>
+              <a:t>Grain means what one row represents. A key identifies a row; a primary key may use more than one column. A join matches keys, and multiple matches can multiply rows.</a:t>
+            </a:r>
+          </a:p>
+          <a:p>
+            <a:r>
+              <a:t/>
+            </a:r>
+          </a:p>
+          <a:p>
+            <a:r>
+              <a:t>CHECK AND EXPECTED ANSWER</a:t>
+            </a:r>
+          </a:p>
+          <a:p>
+            <a:r>
+              <a:t>One order has two lines. After joining orders to lines, how many rows for it? Two. Summing a repeated order-level total would double-count.</a:t>
+            </a:r>
+          </a:p>
+          <a:p>
+            <a:r>
+              <a:t/>
+            </a:r>
+          </a:p>
+          <a:p>
+            <a:r>
+              <a:t>IF LEARNERS ARE STUCK</a:t>
+            </a:r>
+          </a:p>
+          <a:p>
+            <a:r>
+              <a:t>Write one example row from each table. Circle keys and trace each match. Aggregate to the intended grain and check counts and totals.</a:t>
+            </a:r>
+          </a:p>
+          <a:p>
+            <a:r>
+              <a:t/>
+            </a:r>
+          </a:p>
+          <a:p>
+            <a:r>
+              <a:t>NEXT</a:t>
+            </a:r>
+          </a:p>
+          <a:p>
+            <a:r>
+              <a:t>CTE. Move on after a learner can explain the current example or required action.</a:t>
+            </a:r>
+          </a:p>
+        </p:txBody>
+      </p:sp>
+      <p:sp>
+        <p:nvSpPr>
+          <p:cNvPr id="4" name="Slide Number Placeholder 3"/>
+          <p:cNvSpPr>
+            <a:spLocks noGrp="1"/>
+          </p:cNvSpPr>
+          <p:nvPr>
+            <p:ph type="sldNum" idx="5" sz="quarter"/>
+          </p:nvPr>
+        </p:nvSpPr>
+        <p:spPr/>
+      </p:sp>
+    </p:spTree>
+  </p:cSld>
+  <p:clrMapOvr>
+    <a:masterClrMapping/>
+  </p:clrMapOvr>
+</p:notes>
+</file>
+
+<file path=ppt/notesSlides/notesSlide9.xml><?xml version="1.0" encoding="utf-8"?>
+<p:notes xmlns:a="http://schemas.openxmlformats.org/drawingml/2006/main" xmlns:p="http://schemas.openxmlformats.org/presentationml/2006/main">
+  <p:cSld>
+    <p:spTree>
+      <p:nvGrpSpPr>
+        <p:cNvPr id="1" name=""/>
+        <p:cNvGrpSpPr/>
+        <p:nvPr/>
+      </p:nvGrpSpPr>
+      <p:grpSpPr>
+        <a:xfrm>
+          <a:off x="0" y="0"/>
+          <a:ext cx="0" cy="0"/>
+          <a:chOff x="0" y="0"/>
+          <a:chExt cx="0" cy="0"/>
+        </a:xfrm>
+      </p:grpSpPr>
+      <p:sp>
+        <p:nvSpPr>
+          <p:cNvPr id="2" name="Slide Image Placeholder 1"/>
+          <p:cNvSpPr>
+            <a:spLocks noGrp="1"/>
+          </p:cNvSpPr>
+          <p:nvPr>
+            <p:ph type="sldImg" idx="2"/>
+          </p:nvPr>
+        </p:nvSpPr>
+        <p:spPr/>
+      </p:sp>
+      <p:sp>
+        <p:nvSpPr>
+          <p:cNvPr id="3" name="Notes Placeholder 2"/>
+          <p:cNvSpPr>
+            <a:spLocks noGrp="1"/>
+          </p:cNvSpPr>
+          <p:nvPr>
+            <p:ph type="body" idx="3" sz="quarter"/>
+          </p:nvPr>
+        </p:nvSpPr>
+        <p:spPr/>
+        <p:txBody>
+          <a:bodyPr/>
+          <a:lstStyle/>
+          <a:p>
+            <a:r>
+              <a:t>TEACHING PURPOSE</a:t>
+            </a:r>
+          </a:p>
+          <a:p>
+            <a:r>
+              <a:t>CTE</a:t>
+            </a:r>
+          </a:p>
+          <a:p>
+            <a:r>
+              <a:t/>
+            </a:r>
+          </a:p>
+          <a:p>
+            <a:r>
+              <a:t>CONNECT</a:t>
+            </a:r>
+          </a:p>
+          <a:p>
+            <a:r>
+              <a:t>Build on the preceding slide: Fan-out.</a:t>
+            </a:r>
+          </a:p>
+          <a:p>
+            <a:r>
+              <a:t/>
+            </a:r>
+          </a:p>
+          <a:p>
+            <a:r>
+              <a:t>LECTURER CUE</a:t>
+            </a:r>
+          </a:p>
+          <a:p>
+            <a:r>
               <a:t>A named step at the top of a query that you can then use like a table. Short for common table expression, and nobody says that out loud.</a:t>
+            </a:r>
+          </a:p>
+          <a:p>
+            <a:r>
+              <a:t/>
+            </a:r>
+          </a:p>
+          <a:p>
+            <a:r>
+              <a:t>EXPLAIN IN ORDINARY WORDS</a:t>
+            </a:r>
+          </a:p>
+          <a:p>
+            <a:r>
+              <a:t>A notebook contains code cells and explanatory text cells. The runtime remembers values from cells that actually ran, which may differ from their visual order.</a:t>
+            </a:r>
+          </a:p>
+          <a:p>
+            <a:r>
+              <a:t/>
+            </a:r>
+          </a:p>
+          <a:p>
+            <a:r>
+              <a:t>CHECK AND EXPECTED ANSWER</a:t>
+            </a:r>
+          </a:p>
+          <a:p>
+            <a:r>
+              <a:t>Does editing a cell update a value already stored in memory? No; the cell must run.</a:t>
+            </a:r>
+          </a:p>
+          <a:p>
+            <a:r>
+              <a:t/>
+            </a:r>
+          </a:p>
+          <a:p>
+            <a:r>
+              <a:t>IF LEARNERS ARE STUCK</a:t>
+            </a:r>
+          </a:p>
+          <a:p>
+            <a:r>
+              <a:t>Outside an assessment restriction, restart and run from the top after loading data. Fix the first error before later cells; save the successful notebook.</a:t>
+            </a:r>
+          </a:p>
+          <a:p>
+            <a:r>
+              <a:t/>
+            </a:r>
+          </a:p>
+          <a:p>
+            <a:r>
+              <a:t>NEXT</a:t>
+            </a:r>
+          </a:p>
+          <a:p>
+            <a:r>
+              <a:t>Watch the row count decide the answer. Move on after a learner can explain the current example or required action.</a:t>
             </a:r>
           </a:p>
         </p:txBody>
@@ -6460,7 +8727,7 @@
                 </a:solidFill>
                 <a:latin typeface="Calibri"/>
               </a:rPr>
-              <a:t>Fan-out, which is the dangerous one: joining orders to order lines and then summing an order-level column gives a number far too big, and nothing warns you except a row count that moved. Then CTEs: three short named step</a:t>
+              <a:t>Fan-out, which is the dangerous one: joining orders to order lines and then summing an order-level column gives a number far too big, and nothing warns you except a row count that moved.</a:t>
             </a:r>
           </a:p>
         </p:txBody>
@@ -9007,7 +11274,7 @@
         <p:spPr>
           <a:xfrm>
             <a:off x="6575907" y="3025401"/>
-            <a:ext cx="4655667" cy="974621"/>
+            <a:ext cx="4655667" cy="1284255"/>
           </a:xfrm>
           <a:prstGeom prst="rect">
             <a:avLst/>
@@ -9035,7 +11302,7 @@
                 </a:solidFill>
                 <a:latin typeface="Calibri"/>
               </a:rPr>
-              <a:t>That sentence is the assessed part. A query with no conclusion is not an analysis: somebody still has to do the thinking you were asked to do.</a:t>
+              <a:t>Put your judgement in a SQL comment for class discussion. The automatic mark checks the query: 25 points each for grain, gross, returned and net amounts.</a:t>
             </a:r>
           </a:p>
         </p:txBody>
@@ -9048,7 +11315,7 @@
         </p:nvSpPr>
         <p:spPr>
           <a:xfrm>
-            <a:off x="6575907" y="4173759"/>
+            <a:off x="6575907" y="4483393"/>
             <a:ext cx="4655667" cy="664987"/>
           </a:xfrm>
           <a:prstGeom prst="rect">
@@ -9077,7 +11344,7 @@
                 </a:solidFill>
                 <a:latin typeface="Calibri"/>
               </a:rPr>
-              <a:t>Marked against the answer key tonight, so you leave knowing whether it was right.</a:t>
+              <a:t>Submit one .sql file. Amounts allow 1 UGX rounding tolerance; extra or missing rows reduce credit.</a:t>
             </a:r>
           </a:p>
         </p:txBody>
@@ -9192,7 +11459,7 @@
         <p:spPr>
           <a:xfrm>
             <a:off x="685800" y="1600200"/>
-            <a:ext cx="10820095" cy="1100371"/>
+            <a:ext cx="10820095" cy="1603291"/>
           </a:xfrm>
           <a:prstGeom prst="rect">
             <a:avLst/>
@@ -9233,7 +11500,7 @@
         </p:nvSpPr>
         <p:spPr>
           <a:xfrm>
-            <a:off x="685800" y="2792011"/>
+            <a:off x="685800" y="3477811"/>
             <a:ext cx="10820095" cy="457200"/>
           </a:xfrm>
           <a:prstGeom prst="rect">
@@ -12339,7 +14606,7 @@
         <p:spPr>
           <a:xfrm>
             <a:off x="685800" y="1911095"/>
-            <a:ext cx="10820095" cy="969264"/>
+            <a:ext cx="10820095" cy="1236629"/>
           </a:xfrm>
           <a:prstGeom prst="roundRect">
             <a:avLst>
@@ -12384,7 +14651,7 @@
         <p:spPr>
           <a:xfrm>
             <a:off x="978408" y="2112264"/>
-            <a:ext cx="10234879" cy="603504"/>
+            <a:ext cx="10234879" cy="870869"/>
           </a:xfrm>
           <a:prstGeom prst="rect">
             <a:avLst/>
@@ -12425,7 +14692,7 @@
         </p:nvSpPr>
         <p:spPr>
           <a:xfrm>
-            <a:off x="685800" y="3191256"/>
+            <a:off x="685800" y="3422045"/>
             <a:ext cx="10820095" cy="310896"/>
           </a:xfrm>
           <a:prstGeom prst="rect">
@@ -12451,7 +14718,7 @@
                 </a:solidFill>
                 <a:latin typeface="Calibri"/>
               </a:rPr>
-              <a:t>Work these questions in order:</a:t>
+              <a:t>Work these questions in order</a:t>
             </a:r>
           </a:p>
         </p:txBody>
@@ -12464,8 +14731,8 @@
         </p:nvSpPr>
         <p:spPr>
           <a:xfrm>
-            <a:off x="685800" y="3611879"/>
-            <a:ext cx="5227167" cy="365760"/>
+            <a:off x="685800" y="3897533"/>
+            <a:ext cx="5227167" cy="697851"/>
           </a:xfrm>
           <a:prstGeom prst="rect">
             <a:avLst/>
@@ -12493,7 +14760,7 @@
                 </a:solidFill>
                 <a:latin typeface="Calibri"/>
               </a:rPr>
-              <a:t>→  Step one: line value, filtered to delivered and to 2025.</a:t>
+              <a:t>Step one: line value, filtered to delivered and to 2025.</a:t>
             </a:r>
           </a:p>
         </p:txBody>
@@ -12506,8 +14773,8 @@
         </p:nvSpPr>
         <p:spPr>
           <a:xfrm>
-            <a:off x="685800" y="4032504"/>
-            <a:ext cx="5227167" cy="365760"/>
+            <a:off x="685800" y="4686824"/>
+            <a:ext cx="5227167" cy="385501"/>
           </a:xfrm>
           <a:prstGeom prst="rect">
             <a:avLst/>
@@ -12535,7 +14802,7 @@
                 </a:solidFill>
                 <a:latin typeface="Calibri"/>
               </a:rPr>
-              <a:t>→  Check step one on its own.</a:t>
+              <a:t>Check step one on its own.</a:t>
             </a:r>
           </a:p>
         </p:txBody>
@@ -12548,8 +14815,8 @@
         </p:nvSpPr>
         <p:spPr>
           <a:xfrm>
-            <a:off x="685800" y="4453128"/>
-            <a:ext cx="5227167" cy="365760"/>
+            <a:off x="685800" y="5163766"/>
+            <a:ext cx="5227167" cy="385501"/>
           </a:xfrm>
           <a:prstGeom prst="rect">
             <a:avLst/>
@@ -12577,7 +14844,7 @@
                 </a:solidFill>
                 <a:latin typeface="Calibri"/>
               </a:rPr>
-              <a:t>→  Step two: net of returns, with a LEFT JOIN.</a:t>
+              <a:t>Step two: net of returns, with a LEFT JOIN.</a:t>
             </a:r>
           </a:p>
         </p:txBody>
@@ -12590,8 +14857,8 @@
         </p:nvSpPr>
         <p:spPr>
           <a:xfrm>
-            <a:off x="6278727" y="3611879"/>
-            <a:ext cx="5227167" cy="365760"/>
+            <a:off x="6278727" y="3897533"/>
+            <a:ext cx="5227167" cy="385501"/>
           </a:xfrm>
           <a:prstGeom prst="rect">
             <a:avLst/>
@@ -12619,7 +14886,7 @@
                 </a:solidFill>
                 <a:latin typeface="Calibri"/>
               </a:rPr>
-              <a:t>→  Final select: rep names, grouped by rep and month.</a:t>
+              <a:t>Final select: rep names, grouped by rep and month.</a:t>
             </a:r>
           </a:p>
         </p:txBody>
@@ -12632,8 +14899,8 @@
         </p:nvSpPr>
         <p:spPr>
           <a:xfrm>
-            <a:off x="6278727" y="4032504"/>
-            <a:ext cx="5227167" cy="365760"/>
+            <a:off x="6278727" y="4374475"/>
+            <a:ext cx="5227167" cy="697851"/>
           </a:xfrm>
           <a:prstGeom prst="rect">
             <a:avLst/>
@@ -12661,7 +14928,7 @@
                 </a:solidFill>
                 <a:latin typeface="Calibri"/>
               </a:rPr>
-              <a:t>→  Then break it on purpose: make the returns join an INNER JOIN and write down what happened and why.</a:t>
+              <a:t>Then break it on purpose: make the returns join an INNER JOIN and write down what happened and why.</a:t>
             </a:r>
           </a:p>
         </p:txBody>
@@ -12674,8 +14941,8 @@
         </p:nvSpPr>
         <p:spPr>
           <a:xfrm>
-            <a:off x="6278727" y="4453128"/>
-            <a:ext cx="5227167" cy="365760"/>
+            <a:off x="6278727" y="5163766"/>
+            <a:ext cx="5227167" cy="385501"/>
           </a:xfrm>
           <a:prstGeom prst="rect">
             <a:avLst/>
@@ -12703,7 +14970,7 @@
                 </a:solidFill>
                 <a:latin typeface="Calibri"/>
               </a:rPr>
-              <a:t>→  One sentence: which rep do you talk to first?</a:t>
+              <a:t>One sentence: which rep do you talk to first?</a:t>
             </a:r>
           </a:p>
         </p:txBody>
@@ -15182,7 +17449,7 @@
                 </a:solidFill>
                 <a:latin typeface="Calibri"/>
               </a:rPr>
-              <a:t>The join, in SQL now that the idea is already familiar from session 2. INNER, then LEFT, with the row count checked each time, because the number of rows is the fastest way to find out you joined wrongly. The walk-in ord</a:t>
+              <a:t>The join, in SQL now that the idea is already familiar from session 2.</a:t>
             </a:r>
           </a:p>
         </p:txBody>
